--- a/Software Project Management/01. Course Introduction.pptx
+++ b/Software Project Management/01. Course Introduction.pptx
@@ -5,7 +5,7 @@
     <p:sldMasterId id="2147483708" r:id="rId1"/>
   </p:sldMasterIdLst>
   <p:notesMasterIdLst>
-    <p:notesMasterId r:id="rId28"/>
+    <p:notesMasterId r:id="rId27"/>
   </p:notesMasterIdLst>
   <p:sldIdLst>
     <p:sldId id="256" r:id="rId2"/>
@@ -25,15 +25,14 @@
     <p:sldId id="424" r:id="rId16"/>
     <p:sldId id="450" r:id="rId17"/>
     <p:sldId id="404" r:id="rId18"/>
-    <p:sldId id="430" r:id="rId19"/>
-    <p:sldId id="451" r:id="rId20"/>
-    <p:sldId id="440" r:id="rId21"/>
-    <p:sldId id="452" r:id="rId22"/>
-    <p:sldId id="447" r:id="rId23"/>
-    <p:sldId id="449" r:id="rId24"/>
-    <p:sldId id="363" r:id="rId25"/>
-    <p:sldId id="355" r:id="rId26"/>
-    <p:sldId id="444" r:id="rId27"/>
+    <p:sldId id="451" r:id="rId19"/>
+    <p:sldId id="440" r:id="rId20"/>
+    <p:sldId id="452" r:id="rId21"/>
+    <p:sldId id="447" r:id="rId22"/>
+    <p:sldId id="449" r:id="rId23"/>
+    <p:sldId id="454" r:id="rId24"/>
+    <p:sldId id="455" r:id="rId25"/>
+    <p:sldId id="444" r:id="rId26"/>
   </p:sldIdLst>
   <p:sldSz cx="9144000" cy="6858000" type="screen4x3"/>
   <p:notesSz cx="6858000" cy="9144000"/>
@@ -248,7 +247,7 @@
             <a:fld id="{DA36EAF5-5497-4E36-9AC6-23E218E1C14C}" type="datetimeFigureOut">
               <a:rPr lang="en-US" smtClean="0"/>
               <a:pPr/>
-              <a:t>5/17/2025</a:t>
+              <a:t>5/15/2026</a:t>
             </a:fld>
             <a:endParaRPr lang="en-US"/>
           </a:p>
@@ -869,7 +868,7 @@
               <a:pPr>
                 <a:defRPr/>
               </a:pPr>
-              <a:t>5/17/2025</a:t>
+              <a:t>5/15/2026</a:t>
             </a:fld>
             <a:endParaRPr lang="en-US"/>
           </a:p>
@@ -1061,7 +1060,7 @@
               <a:pPr>
                 <a:defRPr/>
               </a:pPr>
-              <a:t>5/17/2025</a:t>
+              <a:t>5/15/2026</a:t>
             </a:fld>
             <a:endParaRPr lang="en-US"/>
           </a:p>
@@ -1263,7 +1262,7 @@
               <a:pPr>
                 <a:defRPr/>
               </a:pPr>
-              <a:t>5/17/2025</a:t>
+              <a:t>5/15/2026</a:t>
             </a:fld>
             <a:endParaRPr lang="en-US"/>
           </a:p>
@@ -1455,7 +1454,7 @@
               <a:pPr>
                 <a:defRPr/>
               </a:pPr>
-              <a:t>5/17/2025</a:t>
+              <a:t>5/15/2026</a:t>
             </a:fld>
             <a:endParaRPr lang="en-US"/>
           </a:p>
@@ -1723,7 +1722,7 @@
               <a:pPr>
                 <a:defRPr/>
               </a:pPr>
-              <a:t>5/17/2025</a:t>
+              <a:t>5/15/2026</a:t>
             </a:fld>
             <a:endParaRPr lang="en-US"/>
           </a:p>
@@ -2033,7 +2032,7 @@
               <a:pPr>
                 <a:defRPr/>
               </a:pPr>
-              <a:t>5/17/2025</a:t>
+              <a:t>5/15/2026</a:t>
             </a:fld>
             <a:endParaRPr lang="en-US"/>
           </a:p>
@@ -2477,7 +2476,7 @@
               <a:pPr>
                 <a:defRPr/>
               </a:pPr>
-              <a:t>5/17/2025</a:t>
+              <a:t>5/15/2026</a:t>
             </a:fld>
             <a:endParaRPr lang="en-US"/>
           </a:p>
@@ -2617,7 +2616,7 @@
               <a:pPr>
                 <a:defRPr/>
               </a:pPr>
-              <a:t>5/17/2025</a:t>
+              <a:t>5/15/2026</a:t>
             </a:fld>
             <a:endParaRPr lang="en-US"/>
           </a:p>
@@ -2734,7 +2733,7 @@
               <a:pPr>
                 <a:defRPr/>
               </a:pPr>
-              <a:t>5/17/2025</a:t>
+              <a:t>5/15/2026</a:t>
             </a:fld>
             <a:endParaRPr lang="en-US"/>
           </a:p>
@@ -3033,7 +3032,7 @@
               <a:pPr>
                 <a:defRPr/>
               </a:pPr>
-              <a:t>5/17/2025</a:t>
+              <a:t>5/15/2026</a:t>
             </a:fld>
             <a:endParaRPr lang="en-US"/>
           </a:p>
@@ -3311,7 +3310,7 @@
               <a:pPr>
                 <a:defRPr/>
               </a:pPr>
-              <a:t>5/17/2025</a:t>
+              <a:t>5/15/2026</a:t>
             </a:fld>
             <a:endParaRPr lang="en-US"/>
           </a:p>
@@ -3559,7 +3558,7 @@
               <a:pPr>
                 <a:defRPr/>
               </a:pPr>
-              <a:t>5/17/2025</a:t>
+              <a:t>5/15/2026</a:t>
             </a:fld>
             <a:endParaRPr lang="en-US"/>
           </a:p>
@@ -4366,8 +4365,8 @@
         </p:nvSpPr>
         <p:spPr bwMode="auto">
           <a:xfrm>
-            <a:off x="1066800" y="1447802"/>
-            <a:ext cx="7848600" cy="5016758"/>
+            <a:off x="1066800" y="1601690"/>
+            <a:ext cx="7848600" cy="4708981"/>
           </a:xfrm>
           <a:prstGeom prst="rect">
             <a:avLst/>
@@ -4429,23 +4428,6 @@
                 <a:cs typeface="Arial" pitchFamily="34" charset="0"/>
               </a:rPr>
               <a:t>Introduction to Software Engineering.</a:t>
-            </a:r>
-          </a:p>
-          <a:p>
-            <a:pPr marL="914400" lvl="1" indent="-457200" algn="just" eaLnBrk="0" hangingPunct="0">
-              <a:buFont typeface="Wingdings" pitchFamily="2" charset="2"/>
-              <a:buChar char="§"/>
-              <a:tabLst>
-                <a:tab pos="1371600" algn="l"/>
-              </a:tabLst>
-            </a:pPr>
-            <a:r>
-              <a:rPr lang="en-US" sz="2000" dirty="0" smtClean="0">
-                <a:latin typeface="+mj-lt"/>
-                <a:ea typeface="Times New Roman" pitchFamily="18" charset="0"/>
-                <a:cs typeface="Arial" pitchFamily="34" charset="0"/>
-              </a:rPr>
-              <a:t>Object-Oriented Programming.</a:t>
             </a:r>
           </a:p>
           <a:p>
@@ -5050,14 +5032,14 @@
               <a:buAutoNum type="arabicPeriod"/>
             </a:pPr>
             <a:r>
-              <a:rPr lang="en-US" sz="2400" dirty="0" smtClean="0">
+              <a:rPr lang="en-US" sz="2200" dirty="0" smtClean="0">
                 <a:latin typeface="Calibri" pitchFamily="34" charset="0"/>
                 <a:cs typeface="Calibri" pitchFamily="34" charset="0"/>
               </a:rPr>
               <a:t>Propose a </a:t>
             </a:r>
             <a:r>
-              <a:rPr lang="en-US" sz="2400" i="1" dirty="0" smtClean="0">
+              <a:rPr lang="en-US" sz="2200" i="1" dirty="0" smtClean="0">
                 <a:solidFill>
                   <a:srgbClr val="C00000"/>
                 </a:solidFill>
@@ -5067,7 +5049,7 @@
               <a:t>software development model</a:t>
             </a:r>
             <a:r>
-              <a:rPr lang="en-US" sz="2400" dirty="0" smtClean="0">
+              <a:rPr lang="en-US" sz="2200" dirty="0" smtClean="0">
                 <a:latin typeface="Calibri" pitchFamily="34" charset="0"/>
                 <a:cs typeface="Calibri" pitchFamily="34" charset="0"/>
               </a:rPr>
@@ -5080,14 +5062,14 @@
               <a:buAutoNum type="arabicPeriod"/>
             </a:pPr>
             <a:r>
-              <a:rPr lang="en-US" sz="2400" dirty="0" smtClean="0">
+              <a:rPr lang="en-US" sz="2200" dirty="0" smtClean="0">
                 <a:latin typeface="Calibri" pitchFamily="34" charset="0"/>
                 <a:cs typeface="Calibri" pitchFamily="34" charset="0"/>
               </a:rPr>
               <a:t>Apply </a:t>
             </a:r>
             <a:r>
-              <a:rPr lang="en-US" sz="2400" i="1" dirty="0" smtClean="0">
+              <a:rPr lang="en-US" sz="2200" i="1" dirty="0" smtClean="0">
                 <a:solidFill>
                   <a:srgbClr val="C00000"/>
                 </a:solidFill>
@@ -5097,11 +5079,11 @@
               <a:t>management activities</a:t>
             </a:r>
             <a:r>
-              <a:rPr lang="en-US" sz="2400" dirty="0" smtClean="0">
+              <a:rPr lang="en-US" sz="2200" dirty="0" smtClean="0">
                 <a:latin typeface="Calibri" pitchFamily="34" charset="0"/>
                 <a:cs typeface="Calibri" pitchFamily="34" charset="0"/>
               </a:rPr>
-              <a:t> to manage a software project.</a:t>
+              <a:t> to software project development, including initiating, planning, executing, monitoring and controlling, and closing a project.</a:t>
             </a:r>
           </a:p>
           <a:p>
@@ -5110,14 +5092,14 @@
               <a:buAutoNum type="arabicPeriod"/>
             </a:pPr>
             <a:r>
-              <a:rPr lang="en-US" sz="2400" dirty="0" smtClean="0">
+              <a:rPr lang="en-US" sz="2200" dirty="0" smtClean="0">
                 <a:latin typeface="Calibri" pitchFamily="34" charset="0"/>
                 <a:cs typeface="Calibri" pitchFamily="34" charset="0"/>
               </a:rPr>
               <a:t>Use </a:t>
             </a:r>
             <a:r>
-              <a:rPr lang="en-US" sz="2400" i="1" dirty="0" smtClean="0">
+              <a:rPr lang="en-US" sz="2200" i="1" dirty="0" smtClean="0">
                 <a:solidFill>
                   <a:srgbClr val="C00000"/>
                 </a:solidFill>
@@ -5127,7 +5109,7 @@
               <a:t>tools</a:t>
             </a:r>
             <a:r>
-              <a:rPr lang="en-US" sz="2400" dirty="0" smtClean="0">
+              <a:rPr lang="en-US" sz="2200" dirty="0" smtClean="0">
                 <a:latin typeface="Calibri" pitchFamily="34" charset="0"/>
                 <a:cs typeface="Calibri" pitchFamily="34" charset="0"/>
               </a:rPr>
@@ -5140,14 +5122,14 @@
               <a:buAutoNum type="arabicPeriod"/>
             </a:pPr>
             <a:r>
-              <a:rPr lang="en-US" sz="2400" dirty="0" smtClean="0">
+              <a:rPr lang="en-US" sz="2200" dirty="0" smtClean="0">
                 <a:latin typeface="Calibri" pitchFamily="34" charset="0"/>
                 <a:cs typeface="Calibri" pitchFamily="34" charset="0"/>
               </a:rPr>
               <a:t>Explain </a:t>
             </a:r>
             <a:r>
-              <a:rPr lang="en-US" sz="2400" i="1" dirty="0" smtClean="0">
+              <a:rPr lang="en-US" sz="2200" i="1" dirty="0" smtClean="0">
                 <a:solidFill>
                   <a:srgbClr val="C00000"/>
                 </a:solidFill>
@@ -5157,14 +5139,14 @@
               <a:t>responsibility</a:t>
             </a:r>
             <a:r>
-              <a:rPr lang="en-US" sz="2400" dirty="0" smtClean="0">
+              <a:rPr lang="en-US" sz="2200" dirty="0" smtClean="0">
                 <a:latin typeface="Calibri" pitchFamily="34" charset="0"/>
                 <a:cs typeface="Calibri" pitchFamily="34" charset="0"/>
               </a:rPr>
               <a:t> and </a:t>
             </a:r>
             <a:r>
-              <a:rPr lang="en-US" sz="2400" i="1" dirty="0" smtClean="0">
+              <a:rPr lang="en-US" sz="2200" i="1" dirty="0" smtClean="0">
                 <a:solidFill>
                   <a:srgbClr val="C00000"/>
                 </a:solidFill>
@@ -5174,7 +5156,7 @@
               <a:t>ethics</a:t>
             </a:r>
             <a:r>
-              <a:rPr lang="en-US" sz="2400" dirty="0" smtClean="0">
+              <a:rPr lang="en-US" sz="2200" dirty="0" smtClean="0">
                 <a:latin typeface="Calibri" pitchFamily="34" charset="0"/>
                 <a:cs typeface="Calibri" pitchFamily="34" charset="0"/>
               </a:rPr>
@@ -5187,14 +5169,14 @@
               <a:buAutoNum type="arabicPeriod"/>
             </a:pPr>
             <a:r>
-              <a:rPr lang="en-US" sz="2400" dirty="0" smtClean="0">
+              <a:rPr lang="en-US" sz="2200" dirty="0" smtClean="0">
                 <a:latin typeface="Calibri" pitchFamily="34" charset="0"/>
                 <a:cs typeface="Calibri" pitchFamily="34" charset="0"/>
               </a:rPr>
               <a:t>Explain </a:t>
             </a:r>
             <a:r>
-              <a:rPr lang="en-US" sz="2400" i="1" dirty="0" smtClean="0">
+              <a:rPr lang="en-US" sz="2200" i="1" dirty="0" smtClean="0">
                 <a:solidFill>
                   <a:srgbClr val="C00000"/>
                 </a:solidFill>
@@ -5204,7 +5186,7 @@
               <a:t>standards</a:t>
             </a:r>
             <a:r>
-              <a:rPr lang="en-US" sz="2400" dirty="0" smtClean="0">
+              <a:rPr lang="en-US" sz="2200" dirty="0" smtClean="0">
                 <a:latin typeface="Calibri" pitchFamily="34" charset="0"/>
                 <a:cs typeface="Calibri" pitchFamily="34" charset="0"/>
               </a:rPr>
@@ -5239,7 +5221,7 @@
               <a:rPr lang="en-US" sz="2400" b="1" dirty="0" smtClean="0">
                 <a:latin typeface="Calibri" pitchFamily="34" charset="0"/>
               </a:rPr>
-              <a:t>6. Engineer 14,000 lines of code software with a </a:t>
+              <a:t>6. Engineer software system with a </a:t>
             </a:r>
             <a:r>
               <a:rPr lang="en-US" sz="2400" b="1" i="1" dirty="0" smtClean="0">
@@ -5254,7 +5236,7 @@
               <a:rPr lang="en-US" sz="2400" b="1" dirty="0" smtClean="0">
                 <a:latin typeface="Calibri" pitchFamily="34" charset="0"/>
               </a:rPr>
-              <a:t> of 7 people</a:t>
+              <a:t> of 5 people</a:t>
             </a:r>
             <a:r>
               <a:rPr lang="vi-VN" sz="2400" b="1" dirty="0" smtClean="0">
@@ -5480,7 +5462,7 @@
             </a:pPr>
             <a:r>
               <a:rPr lang="en-US" sz="2000" dirty="0" smtClean="0"/>
-              <a:t>Software Project</a:t>
+              <a:t>Software Project &amp; AI-in-SE Framing</a:t>
             </a:r>
           </a:p>
           <a:p>
@@ -5500,7 +5482,7 @@
             </a:pPr>
             <a:r>
               <a:rPr lang="en-US" sz="2000" dirty="0" smtClean="0"/>
-              <a:t>Software Development Models</a:t>
+              <a:t>Software Development Models &amp; AI in the SDLC</a:t>
             </a:r>
           </a:p>
           <a:p>
@@ -5540,7 +5522,7 @@
             </a:pPr>
             <a:r>
               <a:rPr lang="en-US" sz="2000" dirty="0" smtClean="0"/>
-              <a:t>Software Team Management</a:t>
+              <a:t>Software Team Management &amp; AI-Augmented Teams</a:t>
             </a:r>
           </a:p>
           <a:p>
@@ -5709,17 +5691,7 @@
                 <a:latin typeface="Calibri" pitchFamily="34" charset="0"/>
                 <a:cs typeface="Calibri" pitchFamily="34" charset="0"/>
               </a:rPr>
-              <a:t>	</a:t>
-            </a:r>
-            <a:r>
-              <a:rPr lang="vi-VN" sz="2600" i="1" dirty="0" smtClean="0">
-                <a:solidFill>
-                  <a:srgbClr val="C00000"/>
-                </a:solidFill>
-                <a:latin typeface="Calibri" pitchFamily="34" charset="0"/>
-                <a:cs typeface="Calibri" pitchFamily="34" charset="0"/>
-              </a:rPr>
-              <a:t>120</a:t>
+              <a:t>	90</a:t>
             </a:r>
             <a:endParaRPr lang="en-US" sz="2600" i="1" dirty="0">
               <a:solidFill>
@@ -6031,7 +6003,7 @@
                 </a:solidFill>
                 <a:latin typeface="Calibri" pitchFamily="34" charset="0"/>
               </a:rPr>
-              <a:t>maximum of 7 members (including a team leader)</a:t>
+              <a:t>maximum of 5 members (including a team leader)</a:t>
             </a:r>
             <a:r>
               <a:rPr lang="en-US" sz="2000" dirty="0" smtClean="0">
@@ -6217,7 +6189,7 @@
                 <a:latin typeface="Calibri" pitchFamily="34" charset="0"/>
                 <a:cs typeface="Calibri" pitchFamily="34" charset="0"/>
               </a:rPr>
-              <a:t>1 team presentation (10%)</a:t>
+              <a:t>Exercises in classroom (40%)</a:t>
             </a:r>
           </a:p>
           <a:p>
@@ -6230,7 +6202,7 @@
                 <a:latin typeface="Calibri" pitchFamily="34" charset="0"/>
                 <a:cs typeface="Calibri" pitchFamily="34" charset="0"/>
               </a:rPr>
-              <a:t>2 individual tests in classroom (20%)</a:t>
+              <a:t>Midterm exam (20%)</a:t>
             </a:r>
           </a:p>
           <a:p>
@@ -6243,20 +6215,7 @@
                 <a:latin typeface="Calibri" pitchFamily="34" charset="0"/>
                 <a:cs typeface="Calibri" pitchFamily="34" charset="0"/>
               </a:rPr>
-              <a:t>Team project (40%)</a:t>
-            </a:r>
-          </a:p>
-          <a:p>
-            <a:pPr lvl="1">
-              <a:buFont typeface="Wingdings" pitchFamily="2" charset="2"/>
-              <a:buChar char="§"/>
-            </a:pPr>
-            <a:r>
-              <a:rPr lang="en-US" sz="2000" dirty="0" smtClean="0">
-                <a:latin typeface="Calibri" pitchFamily="34" charset="0"/>
-                <a:cs typeface="Calibri" pitchFamily="34" charset="0"/>
-              </a:rPr>
-              <a:t>Final oral exam (30%)</a:t>
+              <a:t>Final oral exam (40%)</a:t>
             </a:r>
           </a:p>
           <a:p>
@@ -6464,8 +6423,15 @@
           <a:lstStyle/>
           <a:p>
             <a:r>
+              <a:rPr lang="en-US" dirty="0" smtClean="0">
+                <a:latin typeface="Calibri" pitchFamily="34" charset="0"/>
+                <a:cs typeface="Calibri" pitchFamily="34" charset="0"/>
+              </a:rPr>
+              <a:t>Exercises</a:t>
+            </a:r>
+            <a:r>
               <a:rPr lang="en-US" dirty="0" smtClean="0"/>
-              <a:t>Team Presentation (10%)</a:t>
+              <a:t> in Classroom (40%)</a:t>
             </a:r>
             <a:endParaRPr lang="en-US" dirty="0"/>
           </a:p>
@@ -6481,109 +6447,25 @@
             <p:ph idx="1"/>
           </p:nvPr>
         </p:nvSpPr>
-        <p:spPr>
-          <a:xfrm>
-            <a:off x="457200" y="1600200"/>
-            <a:ext cx="5486400" cy="4525963"/>
-          </a:xfrm>
-        </p:spPr>
+        <p:spPr/>
         <p:txBody>
           <a:bodyPr/>
           <a:lstStyle/>
           <a:p>
             <a:pPr lvl="0"/>
             <a:r>
-              <a:rPr lang="en-US" sz="2400" dirty="0" smtClean="0"/>
-              <a:t>Lecturers list </a:t>
-            </a:r>
-            <a:r>
-              <a:rPr lang="en-US" sz="2400" i="1" dirty="0" smtClean="0">
-                <a:solidFill>
-                  <a:srgbClr val="C00000"/>
-                </a:solidFill>
-              </a:rPr>
-              <a:t>topics</a:t>
-            </a:r>
-            <a:r>
-              <a:rPr lang="en-US" sz="2400" dirty="0" smtClean="0"/>
-              <a:t> and materials, </a:t>
-            </a:r>
-            <a:r>
-              <a:rPr lang="en-US" sz="2400" i="1" dirty="0" smtClean="0">
-                <a:solidFill>
-                  <a:srgbClr val="C00000"/>
-                </a:solidFill>
-              </a:rPr>
-              <a:t>coordinate</a:t>
-            </a:r>
-            <a:r>
-              <a:rPr lang="en-US" sz="2400" dirty="0" smtClean="0"/>
-              <a:t> presentation sessions.</a:t>
-            </a:r>
-          </a:p>
-          <a:p>
-            <a:pPr lvl="0"/>
-            <a:r>
-              <a:rPr lang="en-US" sz="2400" dirty="0" smtClean="0"/>
-              <a:t>Students read materials, find solutions, prepare software, do practices, prepare </a:t>
-            </a:r>
-            <a:r>
-              <a:rPr lang="en-US" sz="2400" i="1" dirty="0" smtClean="0">
-                <a:solidFill>
-                  <a:srgbClr val="C00000"/>
-                </a:solidFill>
-              </a:rPr>
-              <a:t>presentation slides</a:t>
-            </a:r>
-            <a:r>
-              <a:rPr lang="en-US" sz="2400" dirty="0" smtClean="0"/>
-              <a:t> and resources at home, present and discuss in classroom, answer questions, and </a:t>
-            </a:r>
-            <a:r>
-              <a:rPr lang="en-US" sz="2400" i="1" dirty="0" smtClean="0">
-                <a:solidFill>
-                  <a:srgbClr val="C00000"/>
-                </a:solidFill>
-              </a:rPr>
-              <a:t>submit final revised presentation slides</a:t>
-            </a:r>
-            <a:r>
-              <a:rPr lang="en-US" sz="2400" dirty="0" smtClean="0"/>
-              <a:t> and resources via </a:t>
-            </a:r>
-            <a:r>
-              <a:rPr lang="en-US" sz="2400" dirty="0" err="1" smtClean="0"/>
-              <a:t>Moodle</a:t>
-            </a:r>
-            <a:r>
-              <a:rPr lang="en-US" sz="2400" dirty="0" smtClean="0"/>
-              <a:t>.</a:t>
-            </a:r>
-          </a:p>
-          <a:p>
-            <a:pPr lvl="0"/>
-            <a:r>
-              <a:rPr lang="en-US" sz="2400" dirty="0" smtClean="0"/>
-              <a:t>Those teams not doing a presentation in classroom will write and </a:t>
-            </a:r>
-            <a:r>
-              <a:rPr lang="en-US" sz="2400" i="1" dirty="0" smtClean="0">
-                <a:solidFill>
-                  <a:srgbClr val="C00000"/>
-                </a:solidFill>
-              </a:rPr>
-              <a:t>submit reports</a:t>
-            </a:r>
-            <a:r>
-              <a:rPr lang="en-US" sz="2400" dirty="0" smtClean="0"/>
-              <a:t>.</a:t>
-            </a:r>
+              <a:rPr lang="en-US" dirty="0" smtClean="0"/>
+              <a:t>Project artifacts.</a:t>
+            </a:r>
+          </a:p>
+          <a:p>
+            <a:endParaRPr lang="en-US" dirty="0"/>
           </a:p>
         </p:txBody>
       </p:sp>
       <p:pic>
         <p:nvPicPr>
-          <p:cNvPr id="4097" name="Picture 1"/>
+          <p:cNvPr id="4" name="Picture 2" descr="http://www.drandyroark.com/wp-content/uploads/bigstock-Students-at-classes-88291529.jpg"/>
           <p:cNvPicPr>
             <a:picLocks noChangeAspect="1" noChangeArrowheads="1"/>
           </p:cNvPicPr>
@@ -6598,40 +6480,8 @@
         </p:blipFill>
         <p:spPr bwMode="auto">
           <a:xfrm>
-            <a:off x="6021705" y="1752600"/>
-            <a:ext cx="2817495" cy="2160270"/>
-          </a:xfrm>
-          <a:prstGeom prst="rect">
-            <a:avLst/>
-          </a:prstGeom>
-          <a:noFill/>
-          <a:ln w="9525">
-            <a:noFill/>
-            <a:miter lim="800000"/>
-            <a:headEnd/>
-            <a:tailEnd/>
-          </a:ln>
-        </p:spPr>
-      </p:pic>
-      <p:pic>
-        <p:nvPicPr>
-          <p:cNvPr id="4099" name="Picture 3" descr="http://www.prm.nau.edu/PRM346/images/paper%20icon.jpg"/>
-          <p:cNvPicPr>
-            <a:picLocks noChangeAspect="1" noChangeArrowheads="1"/>
-          </p:cNvPicPr>
-          <p:nvPr/>
-        </p:nvPicPr>
-        <p:blipFill>
-          <a:blip r:embed="rId3" cstate="print"/>
-          <a:srcRect/>
-          <a:stretch>
-            <a:fillRect/>
-          </a:stretch>
-        </p:blipFill>
-        <p:spPr bwMode="auto">
-          <a:xfrm>
-            <a:off x="6629400" y="4419600"/>
-            <a:ext cx="1524000" cy="1524001"/>
+            <a:off x="2971800" y="2971800"/>
+            <a:ext cx="3429000" cy="2286000"/>
           </a:xfrm>
           <a:prstGeom prst="rect">
             <a:avLst/>
@@ -6644,13 +6494,6 @@
   <p:clrMapOvr>
     <a:masterClrMapping/>
   </p:clrMapOvr>
-  <p:timing>
-    <p:tnLst>
-      <p:par>
-        <p:cTn id="1" dur="indefinite" restart="never" nodeType="tmRoot"/>
-      </p:par>
-    </p:tnLst>
-  </p:timing>
 </p:sld>
 </file>
 
@@ -6671,70 +6514,9 @@
           <a:chExt cx="0" cy="0"/>
         </a:xfrm>
       </p:grpSpPr>
-      <p:sp>
-        <p:nvSpPr>
-          <p:cNvPr id="2" name="Title 1"/>
-          <p:cNvSpPr>
-            <a:spLocks noGrp="1"/>
-          </p:cNvSpPr>
-          <p:nvPr>
-            <p:ph type="title"/>
-          </p:nvPr>
-        </p:nvSpPr>
-        <p:spPr/>
-        <p:txBody>
-          <a:bodyPr/>
-          <a:lstStyle/>
-          <a:p>
-            <a:r>
-              <a:rPr lang="en-US" dirty="0" smtClean="0"/>
-              <a:t>Individual Tests in Classroom (20%)</a:t>
-            </a:r>
-            <a:endParaRPr lang="en-US" dirty="0"/>
-          </a:p>
-        </p:txBody>
-      </p:sp>
-      <p:sp>
-        <p:nvSpPr>
-          <p:cNvPr id="3" name="Content Placeholder 2"/>
-          <p:cNvSpPr>
-            <a:spLocks noGrp="1"/>
-          </p:cNvSpPr>
-          <p:nvPr>
-            <p:ph idx="1"/>
-          </p:nvPr>
-        </p:nvSpPr>
-        <p:spPr/>
-        <p:txBody>
-          <a:bodyPr/>
-          <a:lstStyle/>
-          <a:p>
-            <a:pPr lvl="0"/>
-            <a:r>
-              <a:rPr lang="en-US" dirty="0" smtClean="0"/>
-              <a:t>Individual test #1: 10%</a:t>
-            </a:r>
-          </a:p>
-          <a:p>
-            <a:r>
-              <a:rPr lang="en-US" dirty="0" smtClean="0"/>
-              <a:t>Individual test #2: 10%</a:t>
-            </a:r>
-          </a:p>
-          <a:p>
-            <a:r>
-              <a:rPr lang="en-US" dirty="0" smtClean="0"/>
-              <a:t>Test date may not be noticed in advance.</a:t>
-            </a:r>
-          </a:p>
-          <a:p>
-            <a:endParaRPr lang="en-US" dirty="0"/>
-          </a:p>
-        </p:txBody>
-      </p:sp>
       <p:pic>
         <p:nvPicPr>
-          <p:cNvPr id="4" name="Picture 2" descr="http://www.drandyroark.com/wp-content/uploads/bigstock-Students-at-classes-88291529.jpg"/>
+          <p:cNvPr id="10" name="Picture 2" descr="https://www.simplilearn.com/ice9/free_resources_article_thumb/Project-Scope-Management-Cover.jpg"/>
           <p:cNvPicPr>
             <a:picLocks noChangeAspect="1" noChangeArrowheads="1"/>
           </p:cNvPicPr>
@@ -6749,8 +6531,8 @@
         </p:blipFill>
         <p:spPr bwMode="auto">
           <a:xfrm>
-            <a:off x="2971800" y="3733800"/>
-            <a:ext cx="3429000" cy="2286000"/>
+            <a:off x="1219200" y="3048000"/>
+            <a:ext cx="3230880" cy="1817370"/>
           </a:xfrm>
           <a:prstGeom prst="rect">
             <a:avLst/>
@@ -6758,11 +6540,96 @@
           <a:noFill/>
         </p:spPr>
       </p:pic>
+      <p:sp>
+        <p:nvSpPr>
+          <p:cNvPr id="2" name="Title 1"/>
+          <p:cNvSpPr>
+            <a:spLocks noGrp="1"/>
+          </p:cNvSpPr>
+          <p:nvPr>
+            <p:ph type="title"/>
+          </p:nvPr>
+        </p:nvSpPr>
+        <p:spPr/>
+        <p:txBody>
+          <a:bodyPr/>
+          <a:lstStyle/>
+          <a:p>
+            <a:r>
+              <a:rPr lang="en-US" dirty="0" smtClean="0"/>
+              <a:t>Midterm Exam (20%)</a:t>
+            </a:r>
+            <a:endParaRPr lang="en-US" dirty="0"/>
+          </a:p>
+        </p:txBody>
+      </p:sp>
+      <p:pic>
+        <p:nvPicPr>
+          <p:cNvPr id="2053" name="Picture 5"/>
+          <p:cNvPicPr>
+            <a:picLocks noChangeAspect="1" noChangeArrowheads="1"/>
+          </p:cNvPicPr>
+          <p:nvPr/>
+        </p:nvPicPr>
+        <p:blipFill>
+          <a:blip r:embed="rId3" cstate="print"/>
+          <a:srcRect/>
+          <a:stretch>
+            <a:fillRect/>
+          </a:stretch>
+        </p:blipFill>
+        <p:spPr bwMode="auto">
+          <a:xfrm>
+            <a:off x="5257800" y="2743200"/>
+            <a:ext cx="2558415" cy="2312289"/>
+          </a:xfrm>
+          <a:prstGeom prst="rect">
+            <a:avLst/>
+          </a:prstGeom>
+          <a:noFill/>
+          <a:ln w="9525">
+            <a:noFill/>
+            <a:miter lim="800000"/>
+            <a:headEnd/>
+            <a:tailEnd/>
+          </a:ln>
+        </p:spPr>
+      </p:pic>
+      <p:sp>
+        <p:nvSpPr>
+          <p:cNvPr id="7" name="Content Placeholder 6"/>
+          <p:cNvSpPr>
+            <a:spLocks noGrp="1"/>
+          </p:cNvSpPr>
+          <p:nvPr>
+            <p:ph idx="1"/>
+          </p:nvPr>
+        </p:nvSpPr>
+        <p:spPr/>
+        <p:txBody>
+          <a:bodyPr/>
+          <a:lstStyle/>
+          <a:p>
+            <a:pPr lvl="0"/>
+            <a:r>
+              <a:rPr lang="en-US" dirty="0" smtClean="0"/>
+              <a:t>Project artifacts.</a:t>
+            </a:r>
+          </a:p>
+        </p:txBody>
+      </p:sp>
     </p:spTree>
   </p:cSld>
   <p:clrMapOvr>
     <a:masterClrMapping/>
   </p:clrMapOvr>
+  <p:timing>
+    <p:tnLst>
+      <p:par>
+        <p:cTn id="1" dur="indefinite" restart="never" nodeType="tmRoot"/>
+      </p:par>
+    </p:tnLst>
+  </p:timing>
 </p:sld>
 </file>
 
@@ -7071,287 +6938,15 @@
           <a:p>
             <a:r>
               <a:rPr lang="en-US" dirty="0" smtClean="0"/>
-              <a:t>Team Project (40%)</a:t>
-            </a:r>
-            <a:endParaRPr lang="en-US" dirty="0"/>
-          </a:p>
-        </p:txBody>
-      </p:sp>
-      <p:sp>
-        <p:nvSpPr>
-          <p:cNvPr id="3" name="Content Placeholder 2"/>
-          <p:cNvSpPr>
-            <a:spLocks noGrp="1"/>
-          </p:cNvSpPr>
-          <p:nvPr>
-            <p:ph idx="1"/>
-          </p:nvPr>
-        </p:nvSpPr>
-        <p:spPr>
-          <a:xfrm>
-            <a:off x="457200" y="1600200"/>
-            <a:ext cx="5410200" cy="2438400"/>
-          </a:xfrm>
-        </p:spPr>
-        <p:txBody>
-          <a:bodyPr/>
-          <a:lstStyle/>
-          <a:p>
-            <a:pPr lvl="0"/>
-            <a:r>
-              <a:rPr lang="en-US" sz="2200" dirty="0" smtClean="0"/>
-              <a:t>Each team </a:t>
-            </a:r>
-            <a:r>
-              <a:rPr lang="en-US" sz="2200" i="1" dirty="0" smtClean="0">
-                <a:solidFill>
-                  <a:srgbClr val="C00000"/>
-                </a:solidFill>
-              </a:rPr>
-              <a:t>selects a topic</a:t>
-            </a:r>
-            <a:r>
-              <a:rPr lang="en-US" sz="2200" dirty="0" smtClean="0"/>
-              <a:t> for project.</a:t>
-            </a:r>
-          </a:p>
-          <a:p>
-            <a:pPr lvl="0"/>
-            <a:r>
-              <a:rPr lang="en-US" sz="2200" dirty="0" smtClean="0"/>
-              <a:t>Lecturers will decide </a:t>
-            </a:r>
-            <a:r>
-              <a:rPr lang="en-US" sz="2200" i="1" dirty="0" smtClean="0">
-                <a:solidFill>
-                  <a:srgbClr val="C00000"/>
-                </a:solidFill>
-              </a:rPr>
-              <a:t>which topics will be approved</a:t>
-            </a:r>
-            <a:r>
-              <a:rPr lang="en-US" sz="2200" dirty="0" smtClean="0"/>
-              <a:t>, or will offer alternative topics, guide the basics, lead the development of projects for students, give feedback for results, and answer students' questions.</a:t>
-            </a:r>
-          </a:p>
-        </p:txBody>
-      </p:sp>
-      <p:pic>
-        <p:nvPicPr>
-          <p:cNvPr id="2053" name="Picture 5"/>
-          <p:cNvPicPr>
-            <a:picLocks noChangeAspect="1" noChangeArrowheads="1"/>
-          </p:cNvPicPr>
-          <p:nvPr/>
-        </p:nvPicPr>
-        <p:blipFill>
-          <a:blip r:embed="rId2" cstate="print"/>
-          <a:srcRect/>
-          <a:stretch>
-            <a:fillRect/>
-          </a:stretch>
-        </p:blipFill>
-        <p:spPr bwMode="auto">
-          <a:xfrm>
-            <a:off x="5899785" y="1524001"/>
-            <a:ext cx="2558415" cy="2312289"/>
-          </a:xfrm>
-          <a:prstGeom prst="rect">
-            <a:avLst/>
-          </a:prstGeom>
-          <a:noFill/>
-          <a:ln w="9525">
-            <a:noFill/>
-            <a:miter lim="800000"/>
-            <a:headEnd/>
-            <a:tailEnd/>
-          </a:ln>
-        </p:spPr>
-      </p:pic>
-      <p:sp>
-        <p:nvSpPr>
-          <p:cNvPr id="8" name="Content Placeholder 2"/>
-          <p:cNvSpPr txBox="1">
-            <a:spLocks/>
-          </p:cNvSpPr>
-          <p:nvPr/>
-        </p:nvSpPr>
-        <p:spPr bwMode="auto">
-          <a:xfrm>
-            <a:off x="3810000" y="4191000"/>
-            <a:ext cx="4953000" cy="1828800"/>
-          </a:xfrm>
-          <a:prstGeom prst="rect">
-            <a:avLst/>
-          </a:prstGeom>
-          <a:noFill/>
-          <a:ln w="9525">
-            <a:noFill/>
-            <a:miter lim="800000"/>
-            <a:headEnd/>
-            <a:tailEnd/>
-          </a:ln>
-        </p:spPr>
-        <p:txBody>
-          <a:bodyPr vert="horz" wrap="square" lIns="91440" tIns="45720" rIns="91440" bIns="45720" numCol="1" anchor="t" anchorCtr="0" compatLnSpc="1">
-            <a:prstTxWarp prst="textNoShape">
-              <a:avLst/>
-            </a:prstTxWarp>
-          </a:bodyPr>
-          <a:lstStyle/>
-          <a:p>
-            <a:pPr marL="342900" lvl="0" indent="-342900" eaLnBrk="0" hangingPunct="0">
-              <a:spcBef>
-                <a:spcPct val="20000"/>
-              </a:spcBef>
-              <a:buFont typeface="Arial" charset="0"/>
-              <a:buChar char="•"/>
-              <a:defRPr/>
-            </a:pPr>
-            <a:r>
-              <a:rPr lang="en-US" sz="2200" dirty="0" smtClean="0">
-                <a:latin typeface="+mj-lt"/>
-              </a:rPr>
-              <a:t>Students need to read the </a:t>
-            </a:r>
-            <a:r>
-              <a:rPr lang="en-US" sz="2200" i="1" dirty="0" smtClean="0">
-                <a:solidFill>
-                  <a:srgbClr val="C00000"/>
-                </a:solidFill>
-                <a:latin typeface="+mj-lt"/>
-              </a:rPr>
-              <a:t>theory materials in advance</a:t>
-            </a:r>
-            <a:r>
-              <a:rPr lang="en-US" sz="2200" dirty="0" smtClean="0">
-                <a:latin typeface="+mj-lt"/>
-              </a:rPr>
-              <a:t> and review the </a:t>
-            </a:r>
-            <a:r>
-              <a:rPr lang="en-US" sz="2200" i="1" dirty="0" smtClean="0">
-                <a:solidFill>
-                  <a:srgbClr val="C00000"/>
-                </a:solidFill>
-                <a:latin typeface="+mj-lt"/>
-              </a:rPr>
-              <a:t>sample products</a:t>
-            </a:r>
-            <a:r>
-              <a:rPr lang="en-US" sz="2200" dirty="0" smtClean="0">
-                <a:latin typeface="+mj-lt"/>
-              </a:rPr>
-              <a:t>, work on a team project, </a:t>
-            </a:r>
-            <a:r>
-              <a:rPr lang="en-US" sz="2200" i="1" dirty="0" smtClean="0">
-                <a:solidFill>
-                  <a:srgbClr val="C00000"/>
-                </a:solidFill>
-                <a:latin typeface="+mj-lt"/>
-              </a:rPr>
-              <a:t>present weekly and mid-term products</a:t>
-            </a:r>
-            <a:r>
-              <a:rPr lang="en-US" sz="2200" dirty="0" smtClean="0">
-                <a:latin typeface="+mj-lt"/>
-              </a:rPr>
-              <a:t>, and submit all final products at the end of the term.</a:t>
-            </a:r>
-            <a:endParaRPr kumimoji="0" lang="en-US" sz="2200" b="0" i="0" u="none" strike="noStrike" kern="1200" cap="none" spc="0" normalizeH="0" baseline="0" noProof="0" dirty="0" smtClean="0">
-              <a:ln>
-                <a:noFill/>
-              </a:ln>
-              <a:solidFill>
-                <a:schemeClr val="tx1"/>
-              </a:solidFill>
-              <a:effectLst/>
-              <a:uLnTx/>
-              <a:uFillTx/>
-              <a:latin typeface="+mj-lt"/>
-              <a:ea typeface="+mn-ea"/>
-              <a:cs typeface="+mn-cs"/>
-            </a:endParaRPr>
-          </a:p>
-        </p:txBody>
-      </p:sp>
-      <p:pic>
-        <p:nvPicPr>
-          <p:cNvPr id="10" name="Picture 2" descr="https://www.simplilearn.com/ice9/free_resources_article_thumb/Project-Scope-Management-Cover.jpg"/>
-          <p:cNvPicPr>
-            <a:picLocks noChangeAspect="1" noChangeArrowheads="1"/>
-          </p:cNvPicPr>
-          <p:nvPr/>
-        </p:nvPicPr>
-        <p:blipFill>
-          <a:blip r:embed="rId3" cstate="print"/>
-          <a:srcRect/>
-          <a:stretch>
-            <a:fillRect/>
-          </a:stretch>
-        </p:blipFill>
-        <p:spPr bwMode="auto">
-          <a:xfrm>
-            <a:off x="457200" y="4343400"/>
-            <a:ext cx="3230880" cy="1817370"/>
-          </a:xfrm>
-          <a:prstGeom prst="rect">
-            <a:avLst/>
-          </a:prstGeom>
-          <a:noFill/>
-        </p:spPr>
-      </p:pic>
-    </p:spTree>
-  </p:cSld>
-  <p:clrMapOvr>
-    <a:masterClrMapping/>
-  </p:clrMapOvr>
-  <p:timing>
-    <p:tnLst>
-      <p:par>
-        <p:cTn id="1" dur="indefinite" restart="never" nodeType="tmRoot"/>
-      </p:par>
-    </p:tnLst>
-  </p:timing>
-</p:sld>
-</file>
-
-<file path=ppt/slides/slide21.xml><?xml version="1.0" encoding="utf-8"?>
-<p:sld xmlns:a="http://schemas.openxmlformats.org/drawingml/2006/main" xmlns:r="http://schemas.openxmlformats.org/officeDocument/2006/relationships" xmlns:p="http://schemas.openxmlformats.org/presentationml/2006/main">
-  <p:cSld>
-    <p:spTree>
-      <p:nvGrpSpPr>
-        <p:cNvPr id="1" name=""/>
-        <p:cNvGrpSpPr/>
-        <p:nvPr/>
-      </p:nvGrpSpPr>
-      <p:grpSpPr>
-        <a:xfrm>
-          <a:off x="0" y="0"/>
-          <a:ext cx="0" cy="0"/>
-          <a:chOff x="0" y="0"/>
-          <a:chExt cx="0" cy="0"/>
-        </a:xfrm>
-      </p:grpSpPr>
-      <p:sp>
-        <p:nvSpPr>
-          <p:cNvPr id="2" name="Title 1"/>
-          <p:cNvSpPr>
-            <a:spLocks noGrp="1"/>
-          </p:cNvSpPr>
-          <p:nvPr>
-            <p:ph type="title"/>
-          </p:nvPr>
-        </p:nvSpPr>
-        <p:spPr/>
-        <p:txBody>
-          <a:bodyPr/>
-          <a:lstStyle/>
-          <a:p>
+              <a:t>Final Individual Oral </a:t>
+            </a:r>
+            <a:r>
+              <a:rPr lang="en-US" smtClean="0"/>
+              <a:t>Exam (40</a:t>
+            </a:r>
             <a:r>
               <a:rPr lang="en-US" dirty="0" smtClean="0"/>
-              <a:t>Final Individual Oral Exam (30%)</a:t>
+              <a:t>%)</a:t>
             </a:r>
             <a:endParaRPr lang="en-US" dirty="0"/>
           </a:p>
@@ -7529,7 +7124,7 @@
 </p:sld>
 </file>
 
-<file path=ppt/slides/slide22.xml><?xml version="1.0" encoding="utf-8"?>
+<file path=ppt/slides/slide21.xml><?xml version="1.0" encoding="utf-8"?>
 <p:sld xmlns:a="http://schemas.openxmlformats.org/drawingml/2006/main" xmlns:r="http://schemas.openxmlformats.org/officeDocument/2006/relationships" xmlns:p="http://schemas.openxmlformats.org/presentationml/2006/main">
   <p:cSld>
     <p:spTree>
@@ -7847,7 +7442,7 @@
 </p:sld>
 </file>
 
-<file path=ppt/slides/slide23.xml><?xml version="1.0" encoding="utf-8"?>
+<file path=ppt/slides/slide22.xml><?xml version="1.0" encoding="utf-8"?>
 <p:sld xmlns:a="http://schemas.openxmlformats.org/drawingml/2006/main" xmlns:r="http://schemas.openxmlformats.org/officeDocument/2006/relationships" xmlns:p="http://schemas.openxmlformats.org/presentationml/2006/main">
   <p:cSld>
     <p:spTree>
@@ -7994,7 +7589,7 @@
 </p:sld>
 </file>
 
-<file path=ppt/slides/slide24.xml><?xml version="1.0" encoding="utf-8"?>
+<file path=ppt/slides/slide23.xml><?xml version="1.0" encoding="utf-8"?>
 <p:sld xmlns:a="http://schemas.openxmlformats.org/drawingml/2006/main" xmlns:r="http://schemas.openxmlformats.org/officeDocument/2006/relationships" xmlns:p="http://schemas.openxmlformats.org/presentationml/2006/main">
   <p:cSld>
     <p:spTree>
@@ -8036,83 +7631,40 @@
       </p:sp>
       <p:sp>
         <p:nvSpPr>
-          <p:cNvPr id="4" name="Content Placeholder 2"/>
-          <p:cNvSpPr txBox="1">
-            <a:spLocks/>
-          </p:cNvSpPr>
-          <p:nvPr/>
-        </p:nvSpPr>
-        <p:spPr bwMode="auto">
+          <p:cNvPr id="3" name="Content Placeholder 2"/>
+          <p:cNvSpPr>
+            <a:spLocks noGrp="1"/>
+          </p:cNvSpPr>
+          <p:nvPr>
+            <p:ph idx="1"/>
+          </p:nvPr>
+        </p:nvSpPr>
+        <p:spPr>
           <a:xfrm>
-            <a:off x="1371600" y="4876800"/>
-            <a:ext cx="6553200" cy="1143000"/>
+            <a:off x="457200" y="1600200"/>
+            <a:ext cx="6324600" cy="4525963"/>
           </a:xfrm>
-          <a:prstGeom prst="rect">
-            <a:avLst/>
-          </a:prstGeom>
-          <a:noFill/>
-          <a:ln w="9525">
-            <a:noFill/>
-            <a:miter lim="800000"/>
-            <a:headEnd/>
-            <a:tailEnd/>
-          </a:ln>
         </p:spPr>
         <p:txBody>
-          <a:bodyPr vert="horz" wrap="square" lIns="91440" tIns="45720" rIns="91440" bIns="45720" numCol="1" anchor="t" anchorCtr="0" compatLnSpc="1">
-            <a:prstTxWarp prst="textNoShape">
-              <a:avLst/>
-            </a:prstTxWarp>
-          </a:bodyPr>
+          <a:bodyPr/>
           <a:lstStyle/>
           <a:p>
-            <a:pPr marL="342900" lvl="0" indent="-342900" algn="ctr" eaLnBrk="0" hangingPunct="0">
-              <a:spcBef>
-                <a:spcPct val="20000"/>
-              </a:spcBef>
-              <a:defRPr/>
-            </a:pPr>
-            <a:r>
-              <a:rPr lang="en-US" sz="3200" i="1" dirty="0" smtClean="0">
-                <a:latin typeface="Calibri" pitchFamily="34" charset="0"/>
-                <a:cs typeface="Calibri" pitchFamily="34" charset="0"/>
-              </a:rPr>
-              <a:t>Specific materials for each </a:t>
-            </a:r>
-            <a:r>
-              <a:rPr lang="en-US" sz="3200" i="1" smtClean="0">
-                <a:latin typeface="Calibri" pitchFamily="34" charset="0"/>
-                <a:cs typeface="Calibri" pitchFamily="34" charset="0"/>
-              </a:rPr>
-              <a:t>course topic: </a:t>
-            </a:r>
-            <a:r>
-              <a:rPr lang="en-US" sz="3200" i="1" dirty="0" smtClean="0">
-                <a:latin typeface="Calibri" pitchFamily="34" charset="0"/>
-                <a:cs typeface="Calibri" pitchFamily="34" charset="0"/>
-              </a:rPr>
-              <a:t>Refer to the course syllabus.</a:t>
-            </a:r>
-            <a:endParaRPr kumimoji="0" lang="en-US" sz="3200" b="0" i="1" u="none" strike="noStrike" kern="1200" cap="none" spc="0" normalizeH="0" baseline="0" noProof="0" dirty="0">
-              <a:ln>
-                <a:noFill/>
-              </a:ln>
-              <a:solidFill>
-                <a:schemeClr val="tx1"/>
-              </a:solidFill>
-              <a:effectLst/>
-              <a:uLnTx/>
-              <a:uFillTx/>
-              <a:latin typeface="Calibri" pitchFamily="34" charset="0"/>
-              <a:ea typeface="+mn-ea"/>
-              <a:cs typeface="Calibri" pitchFamily="34" charset="0"/>
-            </a:endParaRPr>
+            <a:pPr lvl="0"/>
+            <a:r>
+              <a:rPr lang="en-US" sz="2200" dirty="0" smtClean="0"/>
+              <a:t>Project Management Institute (2021). A Guide to the Project Management Body of Knowledge. Seventh Edition. Project Management Institute</a:t>
+            </a:r>
+            <a:r>
+              <a:rPr lang="en-US" sz="2200" dirty="0" smtClean="0"/>
+              <a:t>.</a:t>
+            </a:r>
+            <a:endParaRPr lang="en-US" sz="2200" dirty="0" smtClean="0"/>
           </a:p>
         </p:txBody>
       </p:sp>
       <p:pic>
         <p:nvPicPr>
-          <p:cNvPr id="12291" name="Picture 3"/>
+          <p:cNvPr id="4" name="Picture 3"/>
           <p:cNvPicPr>
             <a:picLocks noChangeAspect="1" noChangeArrowheads="1"/>
           </p:cNvPicPr>
@@ -8127,8 +7679,8 @@
         </p:blipFill>
         <p:spPr bwMode="auto">
           <a:xfrm>
-            <a:off x="3200400" y="1676400"/>
-            <a:ext cx="2714625" cy="2705100"/>
+            <a:off x="6781800" y="1600200"/>
+            <a:ext cx="1809750" cy="1803400"/>
           </a:xfrm>
           <a:prstGeom prst="rect">
             <a:avLst/>
@@ -8142,22 +7694,88 @@
           </a:ln>
         </p:spPr>
       </p:pic>
+      <p:sp>
+        <p:nvSpPr>
+          <p:cNvPr id="5" name="Content Placeholder 2"/>
+          <p:cNvSpPr txBox="1">
+            <a:spLocks/>
+          </p:cNvSpPr>
+          <p:nvPr/>
+        </p:nvSpPr>
+        <p:spPr bwMode="auto">
+          <a:xfrm>
+            <a:off x="1219200" y="5029200"/>
+            <a:ext cx="6705600" cy="838200"/>
+          </a:xfrm>
+          <a:prstGeom prst="rect">
+            <a:avLst/>
+          </a:prstGeom>
+          <a:ln>
+            <a:headEnd/>
+            <a:tailEnd/>
+          </a:ln>
+        </p:spPr>
+        <p:style>
+          <a:lnRef idx="2">
+            <a:schemeClr val="accent6"/>
+          </a:lnRef>
+          <a:fillRef idx="1">
+            <a:schemeClr val="lt1"/>
+          </a:fillRef>
+          <a:effectRef idx="0">
+            <a:schemeClr val="accent6"/>
+          </a:effectRef>
+          <a:fontRef idx="minor">
+            <a:schemeClr val="dk1"/>
+          </a:fontRef>
+        </p:style>
+        <p:txBody>
+          <a:bodyPr vert="horz" wrap="square" lIns="91440" tIns="45720" rIns="91440" bIns="45720" numCol="1" anchor="t" anchorCtr="0" compatLnSpc="1">
+            <a:prstTxWarp prst="textNoShape">
+              <a:avLst/>
+            </a:prstTxWarp>
+          </a:bodyPr>
+          <a:lstStyle/>
+          <a:p>
+            <a:pPr marL="342900" lvl="0" indent="-342900" algn="ctr" eaLnBrk="0" hangingPunct="0">
+              <a:spcBef>
+                <a:spcPct val="20000"/>
+              </a:spcBef>
+              <a:defRPr/>
+            </a:pPr>
+            <a:r>
+              <a:rPr lang="en-US" sz="2400" i="1" dirty="0" smtClean="0">
+                <a:latin typeface="Calibri" pitchFamily="34" charset="0"/>
+                <a:cs typeface="Calibri" pitchFamily="34" charset="0"/>
+              </a:rPr>
+              <a:t>Specific materials for each course topic: Refer to the course slides.</a:t>
+            </a:r>
+            <a:endParaRPr kumimoji="0" lang="en-US" sz="2400" b="0" i="1" u="none" strike="noStrike" kern="1200" cap="none" spc="0" normalizeH="0" baseline="0" noProof="0" dirty="0">
+              <a:ln>
+                <a:noFill/>
+              </a:ln>
+              <a:solidFill>
+                <a:schemeClr val="tx1"/>
+              </a:solidFill>
+              <a:effectLst/>
+              <a:uLnTx/>
+              <a:uFillTx/>
+              <a:latin typeface="Calibri" pitchFamily="34" charset="0"/>
+              <a:ea typeface="+mn-ea"/>
+              <a:cs typeface="Calibri" pitchFamily="34" charset="0"/>
+            </a:endParaRPr>
+          </a:p>
+        </p:txBody>
+      </p:sp>
     </p:spTree>
   </p:cSld>
   <p:clrMapOvr>
     <a:masterClrMapping/>
   </p:clrMapOvr>
-  <p:timing>
-    <p:tnLst>
-      <p:par>
-        <p:cTn id="1" dur="indefinite" restart="never" nodeType="tmRoot"/>
-      </p:par>
-    </p:tnLst>
-  </p:timing>
 </p:sld>
 </file>
 
-<file path=ppt/slides/slide25.xml><?xml version="1.0" encoding="utf-8"?>
+<file path=ppt/slides/slide24.xml><?xml version="1.0" encoding="utf-8"?>
 <p:sld xmlns:a="http://schemas.openxmlformats.org/drawingml/2006/main" xmlns:r="http://schemas.openxmlformats.org/officeDocument/2006/relationships" xmlns:p="http://schemas.openxmlformats.org/presentationml/2006/main">
   <p:cSld>
     <p:spTree>
@@ -8244,7 +7862,7 @@
 </p:sld>
 </file>
 
-<file path=ppt/slides/slide26.xml><?xml version="1.0" encoding="utf-8"?>
+<file path=ppt/slides/slide25.xml><?xml version="1.0" encoding="utf-8"?>
 <p:sld xmlns:a="http://schemas.openxmlformats.org/drawingml/2006/main" xmlns:r="http://schemas.openxmlformats.org/officeDocument/2006/relationships" xmlns:p="http://schemas.openxmlformats.org/presentationml/2006/main">
   <p:cSld>
     <p:spTree>

--- a/Software Project Management/01. Course Introduction.pptx
+++ b/Software Project Management/01. Course Introduction.pptx
@@ -21,9 +21,9 @@
     <p:sldId id="448" r:id="rId12"/>
     <p:sldId id="416" r:id="rId13"/>
     <p:sldId id="417" r:id="rId14"/>
-    <p:sldId id="426" r:id="rId15"/>
-    <p:sldId id="424" r:id="rId16"/>
-    <p:sldId id="450" r:id="rId17"/>
+    <p:sldId id="456" r:id="rId15"/>
+    <p:sldId id="426" r:id="rId16"/>
+    <p:sldId id="424" r:id="rId17"/>
     <p:sldId id="404" r:id="rId18"/>
     <p:sldId id="451" r:id="rId19"/>
     <p:sldId id="440" r:id="rId20"/>
@@ -247,7 +247,7 @@
             <a:fld id="{DA36EAF5-5497-4E36-9AC6-23E218E1C14C}" type="datetimeFigureOut">
               <a:rPr lang="en-US" smtClean="0"/>
               <a:pPr/>
-              <a:t>5/15/2026</a:t>
+              <a:t>5/21/2026</a:t>
             </a:fld>
             <a:endParaRPr lang="en-US"/>
           </a:p>
@@ -868,7 +868,7 @@
               <a:pPr>
                 <a:defRPr/>
               </a:pPr>
-              <a:t>5/15/2026</a:t>
+              <a:t>5/21/2026</a:t>
             </a:fld>
             <a:endParaRPr lang="en-US"/>
           </a:p>
@@ -1060,7 +1060,7 @@
               <a:pPr>
                 <a:defRPr/>
               </a:pPr>
-              <a:t>5/15/2026</a:t>
+              <a:t>5/21/2026</a:t>
             </a:fld>
             <a:endParaRPr lang="en-US"/>
           </a:p>
@@ -1262,7 +1262,7 @@
               <a:pPr>
                 <a:defRPr/>
               </a:pPr>
-              <a:t>5/15/2026</a:t>
+              <a:t>5/21/2026</a:t>
             </a:fld>
             <a:endParaRPr lang="en-US"/>
           </a:p>
@@ -1454,7 +1454,7 @@
               <a:pPr>
                 <a:defRPr/>
               </a:pPr>
-              <a:t>5/15/2026</a:t>
+              <a:t>5/21/2026</a:t>
             </a:fld>
             <a:endParaRPr lang="en-US"/>
           </a:p>
@@ -1722,7 +1722,7 @@
               <a:pPr>
                 <a:defRPr/>
               </a:pPr>
-              <a:t>5/15/2026</a:t>
+              <a:t>5/21/2026</a:t>
             </a:fld>
             <a:endParaRPr lang="en-US"/>
           </a:p>
@@ -2032,7 +2032,7 @@
               <a:pPr>
                 <a:defRPr/>
               </a:pPr>
-              <a:t>5/15/2026</a:t>
+              <a:t>5/21/2026</a:t>
             </a:fld>
             <a:endParaRPr lang="en-US"/>
           </a:p>
@@ -2476,7 +2476,7 @@
               <a:pPr>
                 <a:defRPr/>
               </a:pPr>
-              <a:t>5/15/2026</a:t>
+              <a:t>5/21/2026</a:t>
             </a:fld>
             <a:endParaRPr lang="en-US"/>
           </a:p>
@@ -2616,7 +2616,7 @@
               <a:pPr>
                 <a:defRPr/>
               </a:pPr>
-              <a:t>5/15/2026</a:t>
+              <a:t>5/21/2026</a:t>
             </a:fld>
             <a:endParaRPr lang="en-US"/>
           </a:p>
@@ -2733,7 +2733,7 @@
               <a:pPr>
                 <a:defRPr/>
               </a:pPr>
-              <a:t>5/15/2026</a:t>
+              <a:t>5/21/2026</a:t>
             </a:fld>
             <a:endParaRPr lang="en-US"/>
           </a:p>
@@ -3032,7 +3032,7 @@
               <a:pPr>
                 <a:defRPr/>
               </a:pPr>
-              <a:t>5/15/2026</a:t>
+              <a:t>5/21/2026</a:t>
             </a:fld>
             <a:endParaRPr lang="en-US"/>
           </a:p>
@@ -3310,7 +3310,7 @@
               <a:pPr>
                 <a:defRPr/>
               </a:pPr>
-              <a:t>5/15/2026</a:t>
+              <a:t>5/21/2026</a:t>
             </a:fld>
             <a:endParaRPr lang="en-US"/>
           </a:p>
@@ -3558,7 +3558,7 @@
               <a:pPr>
                 <a:defRPr/>
               </a:pPr>
-              <a:t>5/15/2026</a:t>
+              <a:t>5/21/2026</a:t>
             </a:fld>
             <a:endParaRPr lang="en-US"/>
           </a:p>
@@ -5299,7 +5299,11 @@
           <a:p>
             <a:r>
               <a:rPr lang="en-US" dirty="0" smtClean="0"/>
-              <a:t>Course Contents</a:t>
+              <a:t>Course </a:t>
+            </a:r>
+            <a:r>
+              <a:rPr lang="en-US" dirty="0" smtClean="0"/>
+              <a:t>Content (I)</a:t>
             </a:r>
             <a:endParaRPr lang="en-US" dirty="0"/>
           </a:p>
@@ -5315,7 +5319,7 @@
         </p:nvSpPr>
         <p:spPr bwMode="auto">
           <a:xfrm>
-            <a:off x="381000" y="6019800"/>
+            <a:off x="381000" y="5638800"/>
             <a:ext cx="8458200" cy="609600"/>
           </a:xfrm>
           <a:prstGeom prst="rect">
@@ -5461,9 +5465,14 @@
               <a:buAutoNum type="romanUcPeriod"/>
             </a:pPr>
             <a:r>
-              <a:rPr lang="en-US" sz="2000" dirty="0" smtClean="0"/>
-              <a:t>Software Project &amp; AI-in-SE Framing</a:t>
-            </a:r>
+              <a:rPr lang="en-US" sz="2200" dirty="0" smtClean="0"/>
+              <a:t>Software </a:t>
+            </a:r>
+            <a:r>
+              <a:rPr lang="en-US" sz="2200" dirty="0" smtClean="0"/>
+              <a:t>Project.</a:t>
+            </a:r>
+            <a:endParaRPr lang="en-US" sz="2200" dirty="0" smtClean="0"/>
           </a:p>
           <a:p>
             <a:pPr marL="571500" indent="-571500">
@@ -5471,9 +5480,10 @@
               <a:buAutoNum type="romanUcPeriod"/>
             </a:pPr>
             <a:r>
-              <a:rPr lang="en-US" sz="2000" dirty="0" smtClean="0"/>
-              <a:t>Software Project Initiation</a:t>
-            </a:r>
+              <a:rPr lang="en-US" sz="2200" dirty="0" smtClean="0"/>
+              <a:t>Prompt Patterns.</a:t>
+            </a:r>
+            <a:endParaRPr lang="en-US" sz="2200" dirty="0" smtClean="0"/>
           </a:p>
           <a:p>
             <a:pPr marL="571500" indent="-571500">
@@ -5481,9 +5491,18 @@
               <a:buAutoNum type="romanUcPeriod"/>
             </a:pPr>
             <a:r>
-              <a:rPr lang="en-US" sz="2000" dirty="0" smtClean="0"/>
-              <a:t>Software Development Models &amp; AI in the SDLC</a:t>
-            </a:r>
+              <a:rPr lang="en-US" sz="2200" dirty="0" smtClean="0"/>
+              <a:t>Software </a:t>
+            </a:r>
+            <a:r>
+              <a:rPr lang="en-US" sz="2200" dirty="0" smtClean="0"/>
+              <a:t>Project </a:t>
+            </a:r>
+            <a:r>
+              <a:rPr lang="en-US" sz="2200" dirty="0" smtClean="0"/>
+              <a:t>Initiation.</a:t>
+            </a:r>
+            <a:endParaRPr lang="en-US" sz="2200" dirty="0" smtClean="0"/>
           </a:p>
           <a:p>
             <a:pPr marL="571500" indent="-571500">
@@ -5491,8 +5510,12 @@
               <a:buAutoNum type="romanUcPeriod"/>
             </a:pPr>
             <a:r>
-              <a:rPr lang="en-US" sz="2000" dirty="0" smtClean="0"/>
-              <a:t>Software Estimation</a:t>
+              <a:rPr lang="en-US" sz="2200" dirty="0" smtClean="0"/>
+              <a:t>Software Development </a:t>
+            </a:r>
+            <a:r>
+              <a:rPr lang="en-US" sz="2200" dirty="0" smtClean="0"/>
+              <a:t>Models.</a:t>
             </a:r>
           </a:p>
           <a:p>
@@ -5501,9 +5524,10 @@
               <a:buAutoNum type="romanUcPeriod"/>
             </a:pPr>
             <a:r>
-              <a:rPr lang="en-US" sz="2000" dirty="0" smtClean="0"/>
-              <a:t>Software Project Planning</a:t>
-            </a:r>
+              <a:rPr lang="en-US" sz="2200" dirty="0" smtClean="0"/>
+              <a:t>AI in the SDLC.</a:t>
+            </a:r>
+            <a:endParaRPr lang="en-US" sz="2200" dirty="0" smtClean="0"/>
           </a:p>
           <a:p>
             <a:pPr marL="571500" indent="-571500">
@@ -5511,9 +5535,14 @@
               <a:buAutoNum type="romanUcPeriod"/>
             </a:pPr>
             <a:r>
-              <a:rPr lang="en-US" sz="2000" dirty="0" smtClean="0"/>
-              <a:t>Software Configuration Management</a:t>
-            </a:r>
+              <a:rPr lang="en-US" sz="2200" dirty="0" smtClean="0"/>
+              <a:t>Software </a:t>
+            </a:r>
+            <a:r>
+              <a:rPr lang="en-US" sz="2200" dirty="0" smtClean="0"/>
+              <a:t>Estimation.</a:t>
+            </a:r>
+            <a:endParaRPr lang="en-US" sz="2200" dirty="0" smtClean="0"/>
           </a:p>
           <a:p>
             <a:pPr marL="571500" indent="-571500">
@@ -5521,9 +5550,14 @@
               <a:buAutoNum type="romanUcPeriod"/>
             </a:pPr>
             <a:r>
-              <a:rPr lang="en-US" sz="2000" dirty="0" smtClean="0"/>
-              <a:t>Software Team Management &amp; AI-Augmented Teams</a:t>
-            </a:r>
+              <a:rPr lang="en-US" sz="2200" dirty="0" smtClean="0"/>
+              <a:t>Software Project </a:t>
+            </a:r>
+            <a:r>
+              <a:rPr lang="en-US" sz="2200" dirty="0" smtClean="0"/>
+              <a:t>Planning.</a:t>
+            </a:r>
+            <a:endParaRPr lang="en-US" sz="2200" dirty="0" smtClean="0"/>
           </a:p>
           <a:p>
             <a:pPr marL="571500" indent="-571500">
@@ -5531,8 +5565,12 @@
               <a:buAutoNum type="romanUcPeriod"/>
             </a:pPr>
             <a:r>
-              <a:rPr lang="en-US" sz="2000" dirty="0" smtClean="0"/>
-              <a:t>Software Project Monitoring and Control</a:t>
+              <a:rPr lang="en-US" sz="2200" dirty="0" smtClean="0"/>
+              <a:t>Software Configuration </a:t>
+            </a:r>
+            <a:r>
+              <a:rPr lang="en-US" sz="2200" dirty="0" smtClean="0"/>
+              <a:t>Management.</a:t>
             </a:r>
           </a:p>
           <a:p>
@@ -5541,39 +5579,26 @@
               <a:buAutoNum type="romanUcPeriod"/>
             </a:pPr>
             <a:r>
-              <a:rPr lang="en-US" sz="2000" dirty="0" smtClean="0"/>
-              <a:t>Software Risk Management</a:t>
-            </a:r>
-          </a:p>
-          <a:p>
-            <a:pPr marL="571500" indent="-571500">
-              <a:buFont typeface="+mj-lt"/>
-              <a:buAutoNum type="romanUcPeriod"/>
-            </a:pPr>
-            <a:r>
-              <a:rPr lang="en-US" sz="2000" dirty="0" smtClean="0"/>
-              <a:t>Software Quality Management</a:t>
-            </a:r>
-          </a:p>
-          <a:p>
-            <a:pPr marL="571500" indent="-571500">
-              <a:buFont typeface="+mj-lt"/>
-              <a:buAutoNum type="romanUcPeriod"/>
-            </a:pPr>
-            <a:r>
-              <a:rPr lang="en-US" sz="2000" dirty="0" smtClean="0"/>
-              <a:t>Tools for Software Project Management</a:t>
-            </a:r>
-          </a:p>
-          <a:p>
-            <a:pPr marL="571500" indent="-571500">
-              <a:buFont typeface="+mj-lt"/>
-              <a:buAutoNum type="romanUcPeriod"/>
-            </a:pPr>
-            <a:r>
-              <a:rPr lang="en-US" sz="2000" dirty="0" smtClean="0"/>
-              <a:t>Software Process</a:t>
-            </a:r>
+              <a:rPr lang="it-IT" sz="2200" dirty="0" smtClean="0"/>
+              <a:t>AI </a:t>
+            </a:r>
+            <a:r>
+              <a:rPr lang="it-IT" sz="2200" dirty="0" smtClean="0"/>
+              <a:t>Coding </a:t>
+            </a:r>
+            <a:r>
+              <a:rPr lang="it-IT" sz="2200" dirty="0" smtClean="0"/>
+              <a:t>Assistants &amp; </a:t>
+            </a:r>
+            <a:r>
+              <a:rPr lang="it-IT" sz="2200" dirty="0" smtClean="0"/>
+              <a:t>AI Code Review</a:t>
+            </a:r>
+            <a:r>
+              <a:rPr lang="it-IT" sz="2200" dirty="0" smtClean="0"/>
+              <a:t>.</a:t>
+            </a:r>
+            <a:endParaRPr lang="en-US" sz="2200" dirty="0" smtClean="0"/>
           </a:p>
         </p:txBody>
       </p:sp>
@@ -5586,6 +5611,328 @@
 </file>
 
 <file path=ppt/slides/slide14.xml><?xml version="1.0" encoding="utf-8"?>
+<p:sld xmlns:a="http://schemas.openxmlformats.org/drawingml/2006/main" xmlns:r="http://schemas.openxmlformats.org/officeDocument/2006/relationships" xmlns:p="http://schemas.openxmlformats.org/presentationml/2006/main">
+  <p:cSld>
+    <p:spTree>
+      <p:nvGrpSpPr>
+        <p:cNvPr id="1" name=""/>
+        <p:cNvGrpSpPr/>
+        <p:nvPr/>
+      </p:nvGrpSpPr>
+      <p:grpSpPr>
+        <a:xfrm>
+          <a:off x="0" y="0"/>
+          <a:ext cx="0" cy="0"/>
+          <a:chOff x="0" y="0"/>
+          <a:chExt cx="0" cy="0"/>
+        </a:xfrm>
+      </p:grpSpPr>
+      <p:sp>
+        <p:nvSpPr>
+          <p:cNvPr id="2" name="Title 1"/>
+          <p:cNvSpPr>
+            <a:spLocks noGrp="1"/>
+          </p:cNvSpPr>
+          <p:nvPr>
+            <p:ph type="title"/>
+          </p:nvPr>
+        </p:nvSpPr>
+        <p:spPr/>
+        <p:txBody>
+          <a:bodyPr/>
+          <a:lstStyle/>
+          <a:p>
+            <a:r>
+              <a:rPr lang="en-US" dirty="0" smtClean="0"/>
+              <a:t>Course </a:t>
+            </a:r>
+            <a:r>
+              <a:rPr lang="en-US" dirty="0" smtClean="0"/>
+              <a:t>Content (II)</a:t>
+            </a:r>
+            <a:endParaRPr lang="en-US" dirty="0"/>
+          </a:p>
+        </p:txBody>
+      </p:sp>
+      <p:sp>
+        <p:nvSpPr>
+          <p:cNvPr id="4" name="Content Placeholder 2"/>
+          <p:cNvSpPr txBox="1">
+            <a:spLocks/>
+          </p:cNvSpPr>
+          <p:nvPr/>
+        </p:nvSpPr>
+        <p:spPr bwMode="auto">
+          <a:xfrm>
+            <a:off x="381000" y="5638800"/>
+            <a:ext cx="8458200" cy="609600"/>
+          </a:xfrm>
+          <a:prstGeom prst="rect">
+            <a:avLst/>
+          </a:prstGeom>
+          <a:noFill/>
+          <a:ln w="9525">
+            <a:noFill/>
+            <a:miter lim="800000"/>
+            <a:headEnd/>
+            <a:tailEnd/>
+          </a:ln>
+        </p:spPr>
+        <p:txBody>
+          <a:bodyPr vert="horz" wrap="square" lIns="91440" tIns="45720" rIns="91440" bIns="45720" numCol="1" anchor="t" anchorCtr="0" compatLnSpc="1">
+            <a:prstTxWarp prst="textNoShape">
+              <a:avLst/>
+            </a:prstTxWarp>
+          </a:bodyPr>
+          <a:lstStyle/>
+          <a:p>
+            <a:pPr marL="342900" lvl="0" indent="-342900" algn="ctr" eaLnBrk="0" hangingPunct="0">
+              <a:spcBef>
+                <a:spcPct val="20000"/>
+              </a:spcBef>
+              <a:defRPr/>
+            </a:pPr>
+            <a:r>
+              <a:rPr kumimoji="0" lang="en-US" sz="3200" b="0" i="1" u="none" strike="noStrike" kern="1200" cap="none" spc="0" normalizeH="0" baseline="0" noProof="0" dirty="0" smtClean="0">
+                <a:ln>
+                  <a:noFill/>
+                </a:ln>
+                <a:solidFill>
+                  <a:schemeClr val="tx1"/>
+                </a:solidFill>
+                <a:effectLst/>
+                <a:uLnTx/>
+                <a:uFillTx/>
+                <a:latin typeface="Calibri" pitchFamily="34" charset="0"/>
+                <a:ea typeface="+mn-ea"/>
+                <a:cs typeface="Calibri" pitchFamily="34" charset="0"/>
+              </a:rPr>
+              <a:t>Details</a:t>
+            </a:r>
+            <a:r>
+              <a:rPr lang="en-US" sz="3200" i="1" noProof="0" dirty="0" smtClean="0">
+                <a:latin typeface="Calibri" pitchFamily="34" charset="0"/>
+                <a:cs typeface="Calibri" pitchFamily="34" charset="0"/>
+              </a:rPr>
+              <a:t>: </a:t>
+            </a:r>
+            <a:r>
+              <a:rPr lang="en-US" sz="3200" i="1" baseline="0" dirty="0" smtClean="0">
+                <a:latin typeface="Calibri" pitchFamily="34" charset="0"/>
+                <a:cs typeface="Calibri" pitchFamily="34" charset="0"/>
+              </a:rPr>
+              <a:t>Refer to the course</a:t>
+            </a:r>
+            <a:r>
+              <a:rPr lang="en-US" sz="3200" i="1" dirty="0" smtClean="0">
+                <a:latin typeface="Calibri" pitchFamily="34" charset="0"/>
+                <a:cs typeface="Calibri" pitchFamily="34" charset="0"/>
+              </a:rPr>
+              <a:t> syllabus.</a:t>
+            </a:r>
+          </a:p>
+        </p:txBody>
+      </p:sp>
+      <p:pic>
+        <p:nvPicPr>
+          <p:cNvPr id="1028" name="Picture 4" descr="http://infopros.com/wp-content/uploads/project-management.jpg"/>
+          <p:cNvPicPr>
+            <a:picLocks noChangeAspect="1" noChangeArrowheads="1"/>
+          </p:cNvPicPr>
+          <p:nvPr/>
+        </p:nvPicPr>
+        <p:blipFill>
+          <a:blip r:embed="rId2" cstate="print"/>
+          <a:srcRect/>
+          <a:stretch>
+            <a:fillRect/>
+          </a:stretch>
+        </p:blipFill>
+        <p:spPr bwMode="auto">
+          <a:xfrm>
+            <a:off x="6629400" y="1600200"/>
+            <a:ext cx="2011680" cy="1712976"/>
+          </a:xfrm>
+          <a:prstGeom prst="rect">
+            <a:avLst/>
+          </a:prstGeom>
+          <a:noFill/>
+        </p:spPr>
+      </p:pic>
+      <p:pic>
+        <p:nvPicPr>
+          <p:cNvPr id="1030" name="Picture 6" descr="http://mgt.sjp.ac.lk/acc/wp-content/uploads/2016/01/Book.jpg"/>
+          <p:cNvPicPr>
+            <a:picLocks noChangeAspect="1" noChangeArrowheads="1"/>
+          </p:cNvPicPr>
+          <p:nvPr/>
+        </p:nvPicPr>
+        <p:blipFill>
+          <a:blip r:embed="rId3" cstate="print"/>
+          <a:srcRect/>
+          <a:stretch>
+            <a:fillRect/>
+          </a:stretch>
+        </p:blipFill>
+        <p:spPr bwMode="auto">
+          <a:xfrm>
+            <a:off x="6705600" y="3581400"/>
+            <a:ext cx="2321357" cy="1554480"/>
+          </a:xfrm>
+          <a:prstGeom prst="rect">
+            <a:avLst/>
+          </a:prstGeom>
+          <a:noFill/>
+        </p:spPr>
+      </p:pic>
+      <p:sp>
+        <p:nvSpPr>
+          <p:cNvPr id="3" name="Content Placeholder 2"/>
+          <p:cNvSpPr>
+            <a:spLocks noGrp="1"/>
+          </p:cNvSpPr>
+          <p:nvPr>
+            <p:ph idx="1"/>
+          </p:nvPr>
+        </p:nvSpPr>
+        <p:spPr>
+          <a:xfrm>
+            <a:off x="457200" y="1600201"/>
+            <a:ext cx="6324600" cy="3810000"/>
+          </a:xfrm>
+        </p:spPr>
+        <p:txBody>
+          <a:bodyPr/>
+          <a:lstStyle/>
+          <a:p>
+            <a:pPr marL="571500" indent="-571500">
+              <a:buFont typeface="+mj-lt"/>
+              <a:buAutoNum type="romanUcPeriod"/>
+            </a:pPr>
+            <a:r>
+              <a:rPr lang="en-US" sz="2200" dirty="0" smtClean="0"/>
+              <a:t>Software </a:t>
+            </a:r>
+            <a:r>
+              <a:rPr lang="en-US" sz="2200" dirty="0" smtClean="0"/>
+              <a:t>Team </a:t>
+            </a:r>
+            <a:r>
+              <a:rPr lang="en-US" sz="2200" dirty="0" smtClean="0"/>
+              <a:t>Management.</a:t>
+            </a:r>
+            <a:endParaRPr lang="en-US" sz="2200" dirty="0" smtClean="0"/>
+          </a:p>
+          <a:p>
+            <a:pPr marL="571500" indent="-571500">
+              <a:buFont typeface="+mj-lt"/>
+              <a:buAutoNum type="romanUcPeriod"/>
+            </a:pPr>
+            <a:r>
+              <a:rPr lang="en-US" sz="2200" dirty="0" smtClean="0"/>
+              <a:t>Software Project Monitoring and </a:t>
+            </a:r>
+            <a:r>
+              <a:rPr lang="en-US" sz="2200" dirty="0" smtClean="0"/>
+              <a:t>Control.</a:t>
+            </a:r>
+            <a:endParaRPr lang="en-US" sz="2200" dirty="0" smtClean="0"/>
+          </a:p>
+          <a:p>
+            <a:pPr marL="571500" indent="-571500">
+              <a:buFont typeface="+mj-lt"/>
+              <a:buAutoNum type="romanUcPeriod"/>
+            </a:pPr>
+            <a:r>
+              <a:rPr lang="en-US" sz="2200" dirty="0" smtClean="0"/>
+              <a:t>Software Risk </a:t>
+            </a:r>
+            <a:r>
+              <a:rPr lang="en-US" sz="2200" dirty="0" smtClean="0"/>
+              <a:t>Management.</a:t>
+            </a:r>
+            <a:endParaRPr lang="en-US" sz="2200" dirty="0" smtClean="0"/>
+          </a:p>
+          <a:p>
+            <a:pPr marL="571500" indent="-571500">
+              <a:buFont typeface="+mj-lt"/>
+              <a:buAutoNum type="romanUcPeriod"/>
+            </a:pPr>
+            <a:r>
+              <a:rPr lang="en-US" sz="2200" dirty="0" smtClean="0"/>
+              <a:t>Software Quality </a:t>
+            </a:r>
+            <a:r>
+              <a:rPr lang="en-US" sz="2200" dirty="0" smtClean="0"/>
+              <a:t>Management.</a:t>
+            </a:r>
+            <a:endParaRPr lang="en-US" sz="2200" dirty="0" smtClean="0"/>
+          </a:p>
+          <a:p>
+            <a:pPr marL="571500" indent="-571500">
+              <a:buFont typeface="+mj-lt"/>
+              <a:buAutoNum type="romanUcPeriod"/>
+            </a:pPr>
+            <a:r>
+              <a:rPr lang="en-US" sz="2200" dirty="0" smtClean="0"/>
+              <a:t>Tools for Software Project </a:t>
+            </a:r>
+            <a:r>
+              <a:rPr lang="en-US" sz="2200" dirty="0" smtClean="0"/>
+              <a:t>Management.</a:t>
+            </a:r>
+            <a:endParaRPr lang="en-US" sz="2200" dirty="0" smtClean="0"/>
+          </a:p>
+          <a:p>
+            <a:pPr marL="571500" indent="-571500">
+              <a:buFont typeface="+mj-lt"/>
+              <a:buAutoNum type="romanUcPeriod"/>
+            </a:pPr>
+            <a:r>
+              <a:rPr lang="en-US" sz="2200" dirty="0" smtClean="0"/>
+              <a:t>Software Project Management Methodologies</a:t>
+            </a:r>
+            <a:r>
+              <a:rPr lang="en-US" sz="2200" dirty="0" smtClean="0"/>
+              <a:t>.</a:t>
+            </a:r>
+          </a:p>
+          <a:p>
+            <a:pPr marL="571500" indent="-571500">
+              <a:buFont typeface="+mj-lt"/>
+              <a:buAutoNum type="romanUcPeriod"/>
+            </a:pPr>
+            <a:r>
+              <a:rPr lang="en-US" sz="2200" dirty="0" smtClean="0"/>
+              <a:t>Software Process </a:t>
+            </a:r>
+            <a:r>
+              <a:rPr lang="en-US" sz="2200" dirty="0" smtClean="0"/>
+              <a:t>Improvement.</a:t>
+            </a:r>
+          </a:p>
+          <a:p>
+            <a:pPr marL="571500" indent="-571500">
+              <a:buFont typeface="+mj-lt"/>
+              <a:buAutoNum type="romanUcPeriod"/>
+            </a:pPr>
+            <a:r>
+              <a:rPr lang="en-US" sz="2200" dirty="0" smtClean="0"/>
+              <a:t>Responsible AI, Ethics, and Compliance for AI-Augmented Projects.</a:t>
+            </a:r>
+            <a:endParaRPr lang="en-US" sz="2200" dirty="0" smtClean="0"/>
+          </a:p>
+        </p:txBody>
+      </p:sp>
+    </p:spTree>
+  </p:cSld>
+  <p:clrMapOvr>
+    <a:masterClrMapping/>
+  </p:clrMapOvr>
+</p:sld>
+</file>
+
+<file path=ppt/slides/slide15.xml><?xml version="1.0" encoding="utf-8"?>
 <p:sld xmlns:a="http://schemas.openxmlformats.org/drawingml/2006/main" xmlns:r="http://schemas.openxmlformats.org/officeDocument/2006/relationships" xmlns:p="http://schemas.openxmlformats.org/presentationml/2006/main">
   <p:cSld>
     <p:spTree>
@@ -5798,7 +6145,7 @@
 </p:sld>
 </file>
 
-<file path=ppt/slides/slide15.xml><?xml version="1.0" encoding="utf-8"?>
+<file path=ppt/slides/slide16.xml><?xml version="1.0" encoding="utf-8"?>
 <p:sld xmlns:a="http://schemas.openxmlformats.org/drawingml/2006/main" xmlns:r="http://schemas.openxmlformats.org/officeDocument/2006/relationships" xmlns:p="http://schemas.openxmlformats.org/presentationml/2006/main">
   <p:cSld>
     <p:spTree>
@@ -5857,241 +6204,6 @@
           <a:xfrm>
             <a:off x="1752600" y="1619249"/>
             <a:ext cx="5715000" cy="4705351"/>
-          </a:xfrm>
-          <a:prstGeom prst="rect">
-            <a:avLst/>
-          </a:prstGeom>
-          <a:noFill/>
-        </p:spPr>
-      </p:pic>
-    </p:spTree>
-  </p:cSld>
-  <p:clrMapOvr>
-    <a:masterClrMapping/>
-  </p:clrMapOvr>
-</p:sld>
-</file>
-
-<file path=ppt/slides/slide16.xml><?xml version="1.0" encoding="utf-8"?>
-<p:sld xmlns:a="http://schemas.openxmlformats.org/drawingml/2006/main" xmlns:r="http://schemas.openxmlformats.org/officeDocument/2006/relationships" xmlns:p="http://schemas.openxmlformats.org/presentationml/2006/main">
-  <p:cSld>
-    <p:spTree>
-      <p:nvGrpSpPr>
-        <p:cNvPr id="1" name=""/>
-        <p:cNvGrpSpPr/>
-        <p:nvPr/>
-      </p:nvGrpSpPr>
-      <p:grpSpPr>
-        <a:xfrm>
-          <a:off x="0" y="0"/>
-          <a:ext cx="0" cy="0"/>
-          <a:chOff x="0" y="0"/>
-          <a:chExt cx="0" cy="0"/>
-        </a:xfrm>
-      </p:grpSpPr>
-      <p:pic>
-        <p:nvPicPr>
-          <p:cNvPr id="5" name="Picture 3"/>
-          <p:cNvPicPr>
-            <a:picLocks noChangeAspect="1" noChangeArrowheads="1"/>
-          </p:cNvPicPr>
-          <p:nvPr/>
-        </p:nvPicPr>
-        <p:blipFill>
-          <a:blip r:embed="rId2" cstate="print"/>
-          <a:srcRect/>
-          <a:stretch>
-            <a:fillRect/>
-          </a:stretch>
-        </p:blipFill>
-        <p:spPr bwMode="auto">
-          <a:xfrm>
-            <a:off x="6429786" y="332437"/>
-            <a:ext cx="2257014" cy="1496363"/>
-          </a:xfrm>
-          <a:prstGeom prst="rect">
-            <a:avLst/>
-          </a:prstGeom>
-          <a:noFill/>
-          <a:ln w="9525">
-            <a:noFill/>
-            <a:miter lim="800000"/>
-            <a:headEnd/>
-            <a:tailEnd/>
-          </a:ln>
-        </p:spPr>
-      </p:pic>
-      <p:sp>
-        <p:nvSpPr>
-          <p:cNvPr id="2" name="Title 1"/>
-          <p:cNvSpPr>
-            <a:spLocks noGrp="1"/>
-          </p:cNvSpPr>
-          <p:nvPr>
-            <p:ph type="title"/>
-          </p:nvPr>
-        </p:nvSpPr>
-        <p:spPr/>
-        <p:txBody>
-          <a:bodyPr/>
-          <a:lstStyle/>
-          <a:p>
-            <a:r>
-              <a:rPr lang="en-US" dirty="0" smtClean="0"/>
-              <a:t>Team Forming</a:t>
-            </a:r>
-            <a:endParaRPr lang="en-US" dirty="0"/>
-          </a:p>
-        </p:txBody>
-      </p:sp>
-      <p:sp>
-        <p:nvSpPr>
-          <p:cNvPr id="3" name="Content Placeholder 2"/>
-          <p:cNvSpPr>
-            <a:spLocks noGrp="1"/>
-          </p:cNvSpPr>
-          <p:nvPr>
-            <p:ph idx="1"/>
-          </p:nvPr>
-        </p:nvSpPr>
-        <p:spPr>
-          <a:xfrm>
-            <a:off x="457200" y="1676400"/>
-            <a:ext cx="8229600" cy="3429000"/>
-          </a:xfrm>
-        </p:spPr>
-        <p:txBody>
-          <a:bodyPr/>
-          <a:lstStyle/>
-          <a:p>
-            <a:r>
-              <a:rPr lang="en-US" sz="2000" dirty="0" smtClean="0">
-                <a:latin typeface="Calibri" pitchFamily="34" charset="0"/>
-              </a:rPr>
-              <a:t>Select 8 </a:t>
-            </a:r>
-            <a:r>
-              <a:rPr lang="en-US" sz="2000" i="1" dirty="0" smtClean="0">
-                <a:solidFill>
-                  <a:srgbClr val="C00000"/>
-                </a:solidFill>
-                <a:latin typeface="Calibri" pitchFamily="34" charset="0"/>
-              </a:rPr>
-              <a:t>team leaders</a:t>
-            </a:r>
-            <a:r>
-              <a:rPr lang="en-US" sz="2000" dirty="0" smtClean="0">
-                <a:latin typeface="Calibri" pitchFamily="34" charset="0"/>
-              </a:rPr>
-              <a:t>. </a:t>
-            </a:r>
-            <a:endParaRPr lang="vi-VN" sz="2000" dirty="0" smtClean="0">
-              <a:latin typeface="Calibri" pitchFamily="34" charset="0"/>
-            </a:endParaRPr>
-          </a:p>
-          <a:p>
-            <a:r>
-              <a:rPr lang="en-US" sz="2000" dirty="0" smtClean="0">
-                <a:latin typeface="Calibri" pitchFamily="34" charset="0"/>
-              </a:rPr>
-              <a:t>Students select a team for themselves. Each team has </a:t>
-            </a:r>
-            <a:r>
-              <a:rPr lang="en-US" sz="2000" i="1" dirty="0" smtClean="0">
-                <a:solidFill>
-                  <a:srgbClr val="C00000"/>
-                </a:solidFill>
-                <a:latin typeface="Calibri" pitchFamily="34" charset="0"/>
-              </a:rPr>
-              <a:t>maximum of 5 members (including a team leader)</a:t>
-            </a:r>
-            <a:r>
-              <a:rPr lang="en-US" sz="2000" dirty="0" smtClean="0">
-                <a:latin typeface="Calibri" pitchFamily="34" charset="0"/>
-              </a:rPr>
-              <a:t>.</a:t>
-            </a:r>
-          </a:p>
-          <a:p>
-            <a:r>
-              <a:rPr lang="en-US" sz="2000" dirty="0" smtClean="0">
-                <a:latin typeface="Calibri" pitchFamily="34" charset="0"/>
-              </a:rPr>
-              <a:t>If there are surplus students, some teams can have 8 people.</a:t>
-            </a:r>
-          </a:p>
-          <a:p>
-            <a:r>
-              <a:rPr lang="en-US" sz="2000" dirty="0" smtClean="0">
-                <a:latin typeface="Calibri" pitchFamily="34" charset="0"/>
-              </a:rPr>
-              <a:t>Team leaders send their team members list to class leader.</a:t>
-            </a:r>
-            <a:endParaRPr lang="vi-VN" sz="2000" dirty="0" smtClean="0">
-              <a:latin typeface="Calibri" pitchFamily="34" charset="0"/>
-            </a:endParaRPr>
-          </a:p>
-          <a:p>
-            <a:r>
-              <a:rPr lang="en-US" sz="2000" dirty="0" smtClean="0">
-                <a:latin typeface="Calibri" pitchFamily="34" charset="0"/>
-              </a:rPr>
-              <a:t>The class leader collects and puts all the information to a class management file</a:t>
-            </a:r>
-            <a:r>
-              <a:rPr lang="vi-VN" sz="2000" dirty="0" smtClean="0">
-                <a:latin typeface="Calibri" pitchFamily="34" charset="0"/>
-              </a:rPr>
-              <a:t>.</a:t>
-            </a:r>
-            <a:endParaRPr lang="en-US" sz="2000" dirty="0" smtClean="0">
-              <a:latin typeface="Calibri" pitchFamily="34" charset="0"/>
-            </a:endParaRPr>
-          </a:p>
-          <a:p>
-            <a:r>
-              <a:rPr lang="en-US" sz="2000" dirty="0" smtClean="0">
-                <a:latin typeface="Calibri" pitchFamily="34" charset="0"/>
-              </a:rPr>
-              <a:t>The class leader </a:t>
-            </a:r>
-            <a:r>
-              <a:rPr lang="en-US" sz="2000" i="1" dirty="0" smtClean="0">
-                <a:solidFill>
-                  <a:srgbClr val="C00000"/>
-                </a:solidFill>
-                <a:latin typeface="Calibri" pitchFamily="34" charset="0"/>
-              </a:rPr>
-              <a:t>is authorized</a:t>
-            </a:r>
-            <a:r>
-              <a:rPr lang="en-US" sz="2000" dirty="0" smtClean="0">
-                <a:latin typeface="Calibri" pitchFamily="34" charset="0"/>
-              </a:rPr>
-              <a:t> to assign a team for an individual who is late to class or absent.</a:t>
-            </a:r>
-          </a:p>
-        </p:txBody>
-      </p:sp>
-      <p:pic>
-        <p:nvPicPr>
-          <p:cNvPr id="11266" name="Picture 2" descr="https://cavemaninasuit.com/wp-content/uploads/2020/09/multidisc_teams-1.jpg"/>
-          <p:cNvPicPr>
-            <a:picLocks noChangeAspect="1" noChangeArrowheads="1"/>
-          </p:cNvPicPr>
-          <p:nvPr/>
-        </p:nvPicPr>
-        <p:blipFill>
-          <a:blip r:embed="rId3" cstate="print"/>
-          <a:srcRect/>
-          <a:stretch>
-            <a:fillRect/>
-          </a:stretch>
-        </p:blipFill>
-        <p:spPr bwMode="auto">
-          <a:xfrm>
-            <a:off x="3810000" y="4953000"/>
-            <a:ext cx="2333625" cy="1311275"/>
           </a:xfrm>
           <a:prstGeom prst="rect">
             <a:avLst/>
@@ -7652,13 +7764,8 @@
             <a:pPr lvl="0"/>
             <a:r>
               <a:rPr lang="en-US" sz="2200" dirty="0" smtClean="0"/>
-              <a:t>Project Management Institute (2021). A Guide to the Project Management Body of Knowledge. Seventh Edition. Project Management Institute</a:t>
-            </a:r>
-            <a:r>
-              <a:rPr lang="en-US" sz="2200" dirty="0" smtClean="0"/>
-              <a:t>.</a:t>
-            </a:r>
-            <a:endParaRPr lang="en-US" sz="2200" dirty="0" smtClean="0"/>
+              <a:t>Project Management Institute (2021). A Guide to the Project Management Body of Knowledge. Seventh Edition. Project Management Institute.</a:t>
+            </a:r>
           </a:p>
         </p:txBody>
       </p:sp>
@@ -8030,29 +8137,11 @@
             </a:pPr>
             <a:r>
               <a:rPr lang="en-US" sz="2400" dirty="0" smtClean="0"/>
-              <a:t>To identify a </a:t>
-            </a:r>
-            <a:r>
-              <a:rPr lang="en-US" sz="2400" i="1" dirty="0" smtClean="0">
-                <a:solidFill>
-                  <a:srgbClr val="C00000"/>
-                </a:solidFill>
-              </a:rPr>
-              <a:t>group</a:t>
+              <a:t>To </a:t>
             </a:r>
             <a:r>
               <a:rPr lang="en-US" sz="2400" dirty="0" smtClean="0"/>
-              <a:t> for developing the course project.</a:t>
-            </a:r>
-          </a:p>
-          <a:p>
-            <a:pPr marL="571500" indent="-514350">
-              <a:buFont typeface="Wingdings" pitchFamily="2" charset="2"/>
-              <a:buChar char="Ø"/>
-            </a:pPr>
-            <a:r>
-              <a:rPr lang="en-US" sz="2400" dirty="0" smtClean="0"/>
-              <a:t>To estimate an </a:t>
+              <a:t>estimate an </a:t>
             </a:r>
             <a:r>
               <a:rPr lang="en-US" sz="2400" i="1" dirty="0" smtClean="0">
